--- a/Pothole Graphs.pptx
+++ b/Pothole Graphs.pptx
@@ -4,6 +4,9 @@
   <p:sldMasterIdLst>
     <p:sldMasterId id="2147483648" r:id="rId1"/>
   </p:sldMasterIdLst>
+  <p:notesMasterIdLst>
+    <p:notesMasterId r:id="rId14"/>
+  </p:notesMasterIdLst>
   <p:sldIdLst>
     <p:sldId id="256" r:id="rId2"/>
     <p:sldId id="268" r:id="rId3"/>
@@ -15,7 +18,8 @@
     <p:sldId id="259" r:id="rId9"/>
     <p:sldId id="261" r:id="rId10"/>
     <p:sldId id="263" r:id="rId11"/>
-    <p:sldId id="267" r:id="rId12"/>
+    <p:sldId id="269" r:id="rId12"/>
+    <p:sldId id="267" r:id="rId13"/>
   </p:sldIdLst>
   <p:sldSz cx="12192000" cy="6858000"/>
   <p:notesSz cx="6858000" cy="9144000"/>
@@ -135,7 +139,7 @@
   <pc:docChgLst>
     <pc:chgData name="gabriel fernando mantilla saltos" userId="7e5c19897f5a7e7c" providerId="LiveId" clId="{202073F4-EFF7-4622-8B02-52A55996D141}"/>
     <pc:docChg chg="undo custSel addSld delSld modSld">
-      <pc:chgData name="gabriel fernando mantilla saltos" userId="7e5c19897f5a7e7c" providerId="LiveId" clId="{202073F4-EFF7-4622-8B02-52A55996D141}" dt="2026-03-19T15:05:11.948" v="96" actId="255"/>
+      <pc:chgData name="gabriel fernando mantilla saltos" userId="7e5c19897f5a7e7c" providerId="LiveId" clId="{202073F4-EFF7-4622-8B02-52A55996D141}" dt="2026-03-19T15:33:34.245" v="200" actId="113"/>
       <pc:docMkLst>
         <pc:docMk/>
       </pc:docMkLst>
@@ -154,8 +158,8 @@
           </ac:spMkLst>
         </pc:spChg>
       </pc:sldChg>
-      <pc:sldChg chg="modSp mod">
-        <pc:chgData name="gabriel fernando mantilla saltos" userId="7e5c19897f5a7e7c" providerId="LiveId" clId="{202073F4-EFF7-4622-8B02-52A55996D141}" dt="2026-03-19T14:57:38.338" v="5" actId="1035"/>
+      <pc:sldChg chg="addSp delSp modSp mod">
+        <pc:chgData name="gabriel fernando mantilla saltos" userId="7e5c19897f5a7e7c" providerId="LiveId" clId="{202073F4-EFF7-4622-8B02-52A55996D141}" dt="2026-03-19T15:30:42.358" v="100" actId="1076"/>
         <pc:sldMkLst>
           <pc:docMk/>
           <pc:sldMk cId="3460125726" sldId="263"/>
@@ -168,6 +172,22 @@
             <ac:spMk id="7" creationId="{17785AF1-541C-701E-AAA0-E5C49AC4C275}"/>
           </ac:spMkLst>
         </pc:spChg>
+        <pc:picChg chg="add mod">
+          <ac:chgData name="gabriel fernando mantilla saltos" userId="7e5c19897f5a7e7c" providerId="LiveId" clId="{202073F4-EFF7-4622-8B02-52A55996D141}" dt="2026-03-19T15:30:42.358" v="100" actId="1076"/>
+          <ac:picMkLst>
+            <pc:docMk/>
+            <pc:sldMk cId="3460125726" sldId="263"/>
+            <ac:picMk id="3" creationId="{03EE1032-1780-9166-9372-F2EB9C7B414A}"/>
+          </ac:picMkLst>
+        </pc:picChg>
+        <pc:picChg chg="del">
+          <ac:chgData name="gabriel fernando mantilla saltos" userId="7e5c19897f5a7e7c" providerId="LiveId" clId="{202073F4-EFF7-4622-8B02-52A55996D141}" dt="2026-03-19T15:29:54.626" v="97" actId="478"/>
+          <ac:picMkLst>
+            <pc:docMk/>
+            <pc:sldMk cId="3460125726" sldId="263"/>
+            <ac:picMk id="6" creationId="{7CE01A29-A1DB-AE4B-23A5-BD758988B86E}"/>
+          </ac:picMkLst>
+        </pc:picChg>
       </pc:sldChg>
       <pc:sldChg chg="modSp mod">
         <pc:chgData name="gabriel fernando mantilla saltos" userId="7e5c19897f5a7e7c" providerId="LiveId" clId="{202073F4-EFF7-4622-8B02-52A55996D141}" dt="2026-03-19T14:59:54.713" v="28" actId="6549"/>
@@ -192,13 +212,13 @@
         </pc:sldMkLst>
       </pc:sldChg>
       <pc:sldChg chg="addSp modSp mod">
-        <pc:chgData name="gabriel fernando mantilla saltos" userId="7e5c19897f5a7e7c" providerId="LiveId" clId="{202073F4-EFF7-4622-8B02-52A55996D141}" dt="2026-03-19T15:05:11.948" v="96" actId="255"/>
+        <pc:chgData name="gabriel fernando mantilla saltos" userId="7e5c19897f5a7e7c" providerId="LiveId" clId="{202073F4-EFF7-4622-8B02-52A55996D141}" dt="2026-03-19T15:30:59.265" v="103" actId="20577"/>
         <pc:sldMkLst>
           <pc:docMk/>
           <pc:sldMk cId="3180693807" sldId="267"/>
         </pc:sldMkLst>
         <pc:spChg chg="mod">
-          <ac:chgData name="gabriel fernando mantilla saltos" userId="7e5c19897f5a7e7c" providerId="LiveId" clId="{202073F4-EFF7-4622-8B02-52A55996D141}" dt="2026-03-19T15:05:11.948" v="96" actId="255"/>
+          <ac:chgData name="gabriel fernando mantilla saltos" userId="7e5c19897f5a7e7c" providerId="LiveId" clId="{202073F4-EFF7-4622-8B02-52A55996D141}" dt="2026-03-19T15:30:59.265" v="103" actId="20577"/>
           <ac:spMkLst>
             <pc:docMk/>
             <pc:sldMk cId="3180693807" sldId="267"/>
@@ -231,7 +251,7 @@
         </pc:spChg>
       </pc:sldChg>
       <pc:sldChg chg="delSp modSp new mod">
-        <pc:chgData name="gabriel fernando mantilla saltos" userId="7e5c19897f5a7e7c" providerId="LiveId" clId="{202073F4-EFF7-4622-8B02-52A55996D141}" dt="2026-03-19T15:04:11.804" v="85" actId="27636"/>
+        <pc:chgData name="gabriel fernando mantilla saltos" userId="7e5c19897f5a7e7c" providerId="LiveId" clId="{202073F4-EFF7-4622-8B02-52A55996D141}" dt="2026-03-19T15:33:34.245" v="200" actId="113"/>
         <pc:sldMkLst>
           <pc:docMk/>
           <pc:sldMk cId="3130472943" sldId="268"/>
@@ -245,7 +265,7 @@
           </ac:spMkLst>
         </pc:spChg>
         <pc:spChg chg="mod">
-          <ac:chgData name="gabriel fernando mantilla saltos" userId="7e5c19897f5a7e7c" providerId="LiveId" clId="{202073F4-EFF7-4622-8B02-52A55996D141}" dt="2026-03-19T15:04:11.804" v="85" actId="27636"/>
+          <ac:chgData name="gabriel fernando mantilla saltos" userId="7e5c19897f5a7e7c" providerId="LiveId" clId="{202073F4-EFF7-4622-8B02-52A55996D141}" dt="2026-03-19T15:33:34.245" v="200" actId="113"/>
           <ac:spMkLst>
             <pc:docMk/>
             <pc:sldMk cId="3130472943" sldId="268"/>
@@ -253,12 +273,51 @@
           </ac:spMkLst>
         </pc:spChg>
       </pc:sldChg>
+      <pc:sldChg chg="addSp delSp modSp new mod">
+        <pc:chgData name="gabriel fernando mantilla saltos" userId="7e5c19897f5a7e7c" providerId="LiveId" clId="{202073F4-EFF7-4622-8B02-52A55996D141}" dt="2026-03-19T15:31:58.638" v="111"/>
+        <pc:sldMkLst>
+          <pc:docMk/>
+          <pc:sldMk cId="484537526" sldId="269"/>
+        </pc:sldMkLst>
+        <pc:spChg chg="del">
+          <ac:chgData name="gabriel fernando mantilla saltos" userId="7e5c19897f5a7e7c" providerId="LiveId" clId="{202073F4-EFF7-4622-8B02-52A55996D141}" dt="2026-03-19T15:31:35.941" v="106" actId="478"/>
+          <ac:spMkLst>
+            <pc:docMk/>
+            <pc:sldMk cId="484537526" sldId="269"/>
+            <ac:spMk id="2" creationId="{93E5D69E-5FC4-33C9-97D2-4494509AB474}"/>
+          </ac:spMkLst>
+        </pc:spChg>
+        <pc:spChg chg="del">
+          <ac:chgData name="gabriel fernando mantilla saltos" userId="7e5c19897f5a7e7c" providerId="LiveId" clId="{202073F4-EFF7-4622-8B02-52A55996D141}" dt="2026-03-19T15:31:34.244" v="105" actId="478"/>
+          <ac:spMkLst>
+            <pc:docMk/>
+            <pc:sldMk cId="484537526" sldId="269"/>
+            <ac:spMk id="3" creationId="{C0DC1CE7-23E5-AD7E-5862-6C96B0266395}"/>
+          </ac:spMkLst>
+        </pc:spChg>
+        <pc:spChg chg="add mod">
+          <ac:chgData name="gabriel fernando mantilla saltos" userId="7e5c19897f5a7e7c" providerId="LiveId" clId="{202073F4-EFF7-4622-8B02-52A55996D141}" dt="2026-03-19T15:31:58.638" v="111"/>
+          <ac:spMkLst>
+            <pc:docMk/>
+            <pc:sldMk cId="484537526" sldId="269"/>
+            <ac:spMk id="6" creationId="{1A651416-48A9-785A-5698-5FA6A41B90C0}"/>
+          </ac:spMkLst>
+        </pc:spChg>
+        <pc:picChg chg="add mod">
+          <ac:chgData name="gabriel fernando mantilla saltos" userId="7e5c19897f5a7e7c" providerId="LiveId" clId="{202073F4-EFF7-4622-8B02-52A55996D141}" dt="2026-03-19T15:31:48.210" v="110" actId="1076"/>
+          <ac:picMkLst>
+            <pc:docMk/>
+            <pc:sldMk cId="484537526" sldId="269"/>
+            <ac:picMk id="5" creationId="{AF416A3A-718A-51B8-DA98-43A215AC7D73}"/>
+          </ac:picMkLst>
+        </pc:picChg>
+      </pc:sldChg>
     </pc:docChg>
   </pc:docChgLst>
   <pc:docChgLst>
     <pc:chgData name="gabriel fernando mantilla saltos" userId="7e5c19897f5a7e7c" providerId="LiveId" clId="{982839A1-A367-4754-BFE1-B18A3A50BD87}"/>
     <pc:docChg chg="undo custSel addSld delSld modSld sldOrd">
-      <pc:chgData name="gabriel fernando mantilla saltos" userId="7e5c19897f5a7e7c" providerId="LiveId" clId="{982839A1-A367-4754-BFE1-B18A3A50BD87}" dt="2026-03-15T17:17:55.426" v="721" actId="27636"/>
+      <pc:chgData name="gabriel fernando mantilla saltos" userId="7e5c19897f5a7e7c" providerId="LiveId" clId="{982839A1-A367-4754-BFE1-B18A3A50BD87}" dt="2026-03-20T03:47:55.356" v="764" actId="1076"/>
       <pc:docMkLst>
         <pc:docMk/>
       </pc:docMkLst>
@@ -462,17 +521,9 @@
             <ac:spMk id="7" creationId="{17785AF1-541C-701E-AAA0-E5C49AC4C275}"/>
           </ac:spMkLst>
         </pc:spChg>
-        <pc:picChg chg="add mod">
-          <ac:chgData name="gabriel fernando mantilla saltos" userId="7e5c19897f5a7e7c" providerId="LiveId" clId="{982839A1-A367-4754-BFE1-B18A3A50BD87}" dt="2026-03-15T15:57:04.401" v="521" actId="1076"/>
-          <ac:picMkLst>
-            <pc:docMk/>
-            <pc:sldMk cId="3460125726" sldId="263"/>
-            <ac:picMk id="6" creationId="{7CE01A29-A1DB-AE4B-23A5-BD758988B86E}"/>
-          </ac:picMkLst>
-        </pc:picChg>
       </pc:sldChg>
       <pc:sldChg chg="addSp delSp modSp add mod ord">
-        <pc:chgData name="gabriel fernando mantilla saltos" userId="7e5c19897f5a7e7c" providerId="LiveId" clId="{982839A1-A367-4754-BFE1-B18A3A50BD87}" dt="2026-03-15T15:55:21.474" v="465" actId="123"/>
+        <pc:chgData name="gabriel fernando mantilla saltos" userId="7e5c19897f5a7e7c" providerId="LiveId" clId="{982839A1-A367-4754-BFE1-B18A3A50BD87}" dt="2026-03-20T03:47:55.356" v="764" actId="1076"/>
         <pc:sldMkLst>
           <pc:docMk/>
           <pc:sldMk cId="3352556446" sldId="264"/>
@@ -494,7 +545,7 @@
           </ac:spMkLst>
         </pc:spChg>
         <pc:picChg chg="add mod">
-          <ac:chgData name="gabriel fernando mantilla saltos" userId="7e5c19897f5a7e7c" providerId="LiveId" clId="{982839A1-A367-4754-BFE1-B18A3A50BD87}" dt="2026-03-15T15:53:45.335" v="445" actId="1076"/>
+          <ac:chgData name="gabriel fernando mantilla saltos" userId="7e5c19897f5a7e7c" providerId="LiveId" clId="{982839A1-A367-4754-BFE1-B18A3A50BD87}" dt="2026-03-20T03:47:55.356" v="764" actId="1076"/>
           <ac:picMkLst>
             <pc:docMk/>
             <pc:sldMk cId="3352556446" sldId="264"/>
@@ -526,13 +577,13 @@
         </pc:picChg>
       </pc:sldChg>
       <pc:sldChg chg="modSp new mod">
-        <pc:chgData name="gabriel fernando mantilla saltos" userId="7e5c19897f5a7e7c" providerId="LiveId" clId="{982839A1-A367-4754-BFE1-B18A3A50BD87}" dt="2026-03-15T16:09:01.776" v="678" actId="20577"/>
+        <pc:chgData name="gabriel fernando mantilla saltos" userId="7e5c19897f5a7e7c" providerId="LiveId" clId="{982839A1-A367-4754-BFE1-B18A3A50BD87}" dt="2026-03-20T03:47:25.640" v="761" actId="20577"/>
         <pc:sldMkLst>
           <pc:docMk/>
           <pc:sldMk cId="3180693807" sldId="267"/>
         </pc:sldMkLst>
         <pc:spChg chg="mod">
-          <ac:chgData name="gabriel fernando mantilla saltos" userId="7e5c19897f5a7e7c" providerId="LiveId" clId="{982839A1-A367-4754-BFE1-B18A3A50BD87}" dt="2026-03-15T16:05:50.348" v="616" actId="20577"/>
+          <ac:chgData name="gabriel fernando mantilla saltos" userId="7e5c19897f5a7e7c" providerId="LiveId" clId="{982839A1-A367-4754-BFE1-B18A3A50BD87}" dt="2026-03-20T00:46:19.667" v="726" actId="27636"/>
           <ac:spMkLst>
             <pc:docMk/>
             <pc:sldMk cId="3180693807" sldId="267"/>
@@ -540,7 +591,7 @@
           </ac:spMkLst>
         </pc:spChg>
         <pc:spChg chg="mod">
-          <ac:chgData name="gabriel fernando mantilla saltos" userId="7e5c19897f5a7e7c" providerId="LiveId" clId="{982839A1-A367-4754-BFE1-B18A3A50BD87}" dt="2026-03-15T16:09:01.776" v="678" actId="20577"/>
+          <ac:chgData name="gabriel fernando mantilla saltos" userId="7e5c19897f5a7e7c" providerId="LiveId" clId="{982839A1-A367-4754-BFE1-B18A3A50BD87}" dt="2026-03-20T03:47:25.640" v="761" actId="20577"/>
           <ac:spMkLst>
             <pc:docMk/>
             <pc:sldMk cId="3180693807" sldId="267"/>
@@ -548,9 +599,458 @@
           </ac:spMkLst>
         </pc:spChg>
       </pc:sldChg>
+      <pc:sldChg chg="modSp mod">
+        <pc:chgData name="gabriel fernando mantilla saltos" userId="7e5c19897f5a7e7c" providerId="LiveId" clId="{982839A1-A367-4754-BFE1-B18A3A50BD87}" dt="2026-03-20T03:47:34.369" v="762" actId="1076"/>
+        <pc:sldMkLst>
+          <pc:docMk/>
+          <pc:sldMk cId="484537526" sldId="269"/>
+        </pc:sldMkLst>
+        <pc:picChg chg="mod">
+          <ac:chgData name="gabriel fernando mantilla saltos" userId="7e5c19897f5a7e7c" providerId="LiveId" clId="{982839A1-A367-4754-BFE1-B18A3A50BD87}" dt="2026-03-20T03:47:34.369" v="762" actId="1076"/>
+          <ac:picMkLst>
+            <pc:docMk/>
+            <pc:sldMk cId="484537526" sldId="269"/>
+            <ac:picMk id="5" creationId="{AF416A3A-718A-51B8-DA98-43A215AC7D73}"/>
+          </ac:picMkLst>
+        </pc:picChg>
+      </pc:sldChg>
     </pc:docChg>
   </pc:docChgLst>
 </pc:chgInfo>
+</file>
+
+<file path=ppt/notesMasters/notesMaster1.xml><?xml version="1.0" encoding="utf-8"?>
+<p:notesMaster xmlns:a="http://schemas.openxmlformats.org/drawingml/2006/main" xmlns:r="http://schemas.openxmlformats.org/officeDocument/2006/relationships" xmlns:p="http://schemas.openxmlformats.org/presentationml/2006/main">
+  <p:cSld>
+    <p:bg>
+      <p:bgRef idx="1001">
+        <a:schemeClr val="bg1"/>
+      </p:bgRef>
+    </p:bg>
+    <p:spTree>
+      <p:nvGrpSpPr>
+        <p:cNvPr id="1" name=""/>
+        <p:cNvGrpSpPr/>
+        <p:nvPr/>
+      </p:nvGrpSpPr>
+      <p:grpSpPr>
+        <a:xfrm>
+          <a:off x="0" y="0"/>
+          <a:ext cx="0" cy="0"/>
+          <a:chOff x="0" y="0"/>
+          <a:chExt cx="0" cy="0"/>
+        </a:xfrm>
+      </p:grpSpPr>
+      <p:sp>
+        <p:nvSpPr>
+          <p:cNvPr id="2" name="Header Placeholder 1"/>
+          <p:cNvSpPr>
+            <a:spLocks noGrp="1"/>
+          </p:cNvSpPr>
+          <p:nvPr>
+            <p:ph type="hdr" sz="quarter"/>
+          </p:nvPr>
+        </p:nvSpPr>
+        <p:spPr>
+          <a:xfrm>
+            <a:off x="0" y="0"/>
+            <a:ext cx="2971800" cy="458788"/>
+          </a:xfrm>
+          <a:prstGeom prst="rect">
+            <a:avLst/>
+          </a:prstGeom>
+        </p:spPr>
+        <p:txBody>
+          <a:bodyPr vert="horz" lIns="91440" tIns="45720" rIns="91440" bIns="45720" rtlCol="0"/>
+          <a:lstStyle>
+            <a:lvl1pPr algn="l">
+              <a:defRPr sz="1200"/>
+            </a:lvl1pPr>
+          </a:lstStyle>
+          <a:p>
+            <a:endParaRPr lang="es-419"/>
+          </a:p>
+        </p:txBody>
+      </p:sp>
+      <p:sp>
+        <p:nvSpPr>
+          <p:cNvPr id="3" name="Date Placeholder 2"/>
+          <p:cNvSpPr>
+            <a:spLocks noGrp="1"/>
+          </p:cNvSpPr>
+          <p:nvPr>
+            <p:ph type="dt" idx="1"/>
+          </p:nvPr>
+        </p:nvSpPr>
+        <p:spPr>
+          <a:xfrm>
+            <a:off x="3884613" y="0"/>
+            <a:ext cx="2971800" cy="458788"/>
+          </a:xfrm>
+          <a:prstGeom prst="rect">
+            <a:avLst/>
+          </a:prstGeom>
+        </p:spPr>
+        <p:txBody>
+          <a:bodyPr vert="horz" lIns="91440" tIns="45720" rIns="91440" bIns="45720" rtlCol="0"/>
+          <a:lstStyle>
+            <a:lvl1pPr algn="r">
+              <a:defRPr sz="1200"/>
+            </a:lvl1pPr>
+          </a:lstStyle>
+          <a:p>
+            <a:fld id="{EF3014CB-382B-47BD-BFFB-736505C1D25D}" type="datetimeFigureOut">
+              <a:rPr lang="es-419" smtClean="0"/>
+              <a:t>19/3/2026</a:t>
+            </a:fld>
+            <a:endParaRPr lang="es-419"/>
+          </a:p>
+        </p:txBody>
+      </p:sp>
+      <p:sp>
+        <p:nvSpPr>
+          <p:cNvPr id="4" name="Slide Image Placeholder 3"/>
+          <p:cNvSpPr>
+            <a:spLocks noGrp="1" noRot="1" noChangeAspect="1"/>
+          </p:cNvSpPr>
+          <p:nvPr>
+            <p:ph type="sldImg" idx="2"/>
+          </p:nvPr>
+        </p:nvSpPr>
+        <p:spPr>
+          <a:xfrm>
+            <a:off x="685800" y="1143000"/>
+            <a:ext cx="5486400" cy="3086100"/>
+          </a:xfrm>
+          <a:prstGeom prst="rect">
+            <a:avLst/>
+          </a:prstGeom>
+          <a:noFill/>
+          <a:ln w="12700">
+            <a:solidFill>
+              <a:prstClr val="black"/>
+            </a:solidFill>
+          </a:ln>
+        </p:spPr>
+        <p:txBody>
+          <a:bodyPr vert="horz" lIns="91440" tIns="45720" rIns="91440" bIns="45720" rtlCol="0" anchor="ctr"/>
+          <a:lstStyle/>
+          <a:p>
+            <a:endParaRPr lang="es-419"/>
+          </a:p>
+        </p:txBody>
+      </p:sp>
+      <p:sp>
+        <p:nvSpPr>
+          <p:cNvPr id="5" name="Notes Placeholder 4"/>
+          <p:cNvSpPr>
+            <a:spLocks noGrp="1"/>
+          </p:cNvSpPr>
+          <p:nvPr>
+            <p:ph type="body" sz="quarter" idx="3"/>
+          </p:nvPr>
+        </p:nvSpPr>
+        <p:spPr>
+          <a:xfrm>
+            <a:off x="685800" y="4400550"/>
+            <a:ext cx="5486400" cy="3600450"/>
+          </a:xfrm>
+          <a:prstGeom prst="rect">
+            <a:avLst/>
+          </a:prstGeom>
+        </p:spPr>
+        <p:txBody>
+          <a:bodyPr vert="horz" lIns="91440" tIns="45720" rIns="91440" bIns="45720" rtlCol="0"/>
+          <a:lstStyle/>
+          <a:p>
+            <a:pPr lvl="0"/>
+            <a:r>
+              <a:rPr lang="en-US"/>
+              <a:t>Click to edit Master text styles</a:t>
+            </a:r>
+          </a:p>
+          <a:p>
+            <a:pPr lvl="1"/>
+            <a:r>
+              <a:rPr lang="en-US"/>
+              <a:t>Second level</a:t>
+            </a:r>
+          </a:p>
+          <a:p>
+            <a:pPr lvl="2"/>
+            <a:r>
+              <a:rPr lang="en-US"/>
+              <a:t>Third level</a:t>
+            </a:r>
+          </a:p>
+          <a:p>
+            <a:pPr lvl="3"/>
+            <a:r>
+              <a:rPr lang="en-US"/>
+              <a:t>Fourth level</a:t>
+            </a:r>
+          </a:p>
+          <a:p>
+            <a:pPr lvl="4"/>
+            <a:r>
+              <a:rPr lang="en-US"/>
+              <a:t>Fifth level</a:t>
+            </a:r>
+            <a:endParaRPr lang="es-419"/>
+          </a:p>
+        </p:txBody>
+      </p:sp>
+      <p:sp>
+        <p:nvSpPr>
+          <p:cNvPr id="6" name="Footer Placeholder 5"/>
+          <p:cNvSpPr>
+            <a:spLocks noGrp="1"/>
+          </p:cNvSpPr>
+          <p:nvPr>
+            <p:ph type="ftr" sz="quarter" idx="4"/>
+          </p:nvPr>
+        </p:nvSpPr>
+        <p:spPr>
+          <a:xfrm>
+            <a:off x="0" y="8685213"/>
+            <a:ext cx="2971800" cy="458787"/>
+          </a:xfrm>
+          <a:prstGeom prst="rect">
+            <a:avLst/>
+          </a:prstGeom>
+        </p:spPr>
+        <p:txBody>
+          <a:bodyPr vert="horz" lIns="91440" tIns="45720" rIns="91440" bIns="45720" rtlCol="0" anchor="b"/>
+          <a:lstStyle>
+            <a:lvl1pPr algn="l">
+              <a:defRPr sz="1200"/>
+            </a:lvl1pPr>
+          </a:lstStyle>
+          <a:p>
+            <a:endParaRPr lang="es-419"/>
+          </a:p>
+        </p:txBody>
+      </p:sp>
+      <p:sp>
+        <p:nvSpPr>
+          <p:cNvPr id="7" name="Slide Number Placeholder 6"/>
+          <p:cNvSpPr>
+            <a:spLocks noGrp="1"/>
+          </p:cNvSpPr>
+          <p:nvPr>
+            <p:ph type="sldNum" sz="quarter" idx="5"/>
+          </p:nvPr>
+        </p:nvSpPr>
+        <p:spPr>
+          <a:xfrm>
+            <a:off x="3884613" y="8685213"/>
+            <a:ext cx="2971800" cy="458787"/>
+          </a:xfrm>
+          <a:prstGeom prst="rect">
+            <a:avLst/>
+          </a:prstGeom>
+        </p:spPr>
+        <p:txBody>
+          <a:bodyPr vert="horz" lIns="91440" tIns="45720" rIns="91440" bIns="45720" rtlCol="0" anchor="b"/>
+          <a:lstStyle>
+            <a:lvl1pPr algn="r">
+              <a:defRPr sz="1200"/>
+            </a:lvl1pPr>
+          </a:lstStyle>
+          <a:p>
+            <a:fld id="{502162E8-8D8F-4731-BCC2-3C842183D0BF}" type="slidenum">
+              <a:rPr lang="es-419" smtClean="0"/>
+              <a:t>‹#›</a:t>
+            </a:fld>
+            <a:endParaRPr lang="es-419"/>
+          </a:p>
+        </p:txBody>
+      </p:sp>
+    </p:spTree>
+    <p:extLst>
+      <p:ext uri="{BB962C8B-B14F-4D97-AF65-F5344CB8AC3E}">
+        <p14:creationId xmlns:p14="http://schemas.microsoft.com/office/powerpoint/2010/main" val="4174715726"/>
+      </p:ext>
+    </p:extLst>
+  </p:cSld>
+  <p:clrMap bg1="lt1" tx1="dk1" bg2="lt2" tx2="dk2" accent1="accent1" accent2="accent2" accent3="accent3" accent4="accent4" accent5="accent5" accent6="accent6" hlink="hlink" folHlink="folHlink"/>
+  <p:notesStyle>
+    <a:lvl1pPr marL="0" algn="l" defTabSz="914400" rtl="0" eaLnBrk="1" latinLnBrk="0" hangingPunct="1">
+      <a:defRPr sz="1200" kern="1200">
+        <a:solidFill>
+          <a:schemeClr val="tx1"/>
+        </a:solidFill>
+        <a:latin typeface="+mn-lt"/>
+        <a:ea typeface="+mn-ea"/>
+        <a:cs typeface="+mn-cs"/>
+      </a:defRPr>
+    </a:lvl1pPr>
+    <a:lvl2pPr marL="457200" algn="l" defTabSz="914400" rtl="0" eaLnBrk="1" latinLnBrk="0" hangingPunct="1">
+      <a:defRPr sz="1200" kern="1200">
+        <a:solidFill>
+          <a:schemeClr val="tx1"/>
+        </a:solidFill>
+        <a:latin typeface="+mn-lt"/>
+        <a:ea typeface="+mn-ea"/>
+        <a:cs typeface="+mn-cs"/>
+      </a:defRPr>
+    </a:lvl2pPr>
+    <a:lvl3pPr marL="914400" algn="l" defTabSz="914400" rtl="0" eaLnBrk="1" latinLnBrk="0" hangingPunct="1">
+      <a:defRPr sz="1200" kern="1200">
+        <a:solidFill>
+          <a:schemeClr val="tx1"/>
+        </a:solidFill>
+        <a:latin typeface="+mn-lt"/>
+        <a:ea typeface="+mn-ea"/>
+        <a:cs typeface="+mn-cs"/>
+      </a:defRPr>
+    </a:lvl3pPr>
+    <a:lvl4pPr marL="1371600" algn="l" defTabSz="914400" rtl="0" eaLnBrk="1" latinLnBrk="0" hangingPunct="1">
+      <a:defRPr sz="1200" kern="1200">
+        <a:solidFill>
+          <a:schemeClr val="tx1"/>
+        </a:solidFill>
+        <a:latin typeface="+mn-lt"/>
+        <a:ea typeface="+mn-ea"/>
+        <a:cs typeface="+mn-cs"/>
+      </a:defRPr>
+    </a:lvl4pPr>
+    <a:lvl5pPr marL="1828800" algn="l" defTabSz="914400" rtl="0" eaLnBrk="1" latinLnBrk="0" hangingPunct="1">
+      <a:defRPr sz="1200" kern="1200">
+        <a:solidFill>
+          <a:schemeClr val="tx1"/>
+        </a:solidFill>
+        <a:latin typeface="+mn-lt"/>
+        <a:ea typeface="+mn-ea"/>
+        <a:cs typeface="+mn-cs"/>
+      </a:defRPr>
+    </a:lvl5pPr>
+    <a:lvl6pPr marL="2286000" algn="l" defTabSz="914400" rtl="0" eaLnBrk="1" latinLnBrk="0" hangingPunct="1">
+      <a:defRPr sz="1200" kern="1200">
+        <a:solidFill>
+          <a:schemeClr val="tx1"/>
+        </a:solidFill>
+        <a:latin typeface="+mn-lt"/>
+        <a:ea typeface="+mn-ea"/>
+        <a:cs typeface="+mn-cs"/>
+      </a:defRPr>
+    </a:lvl6pPr>
+    <a:lvl7pPr marL="2743200" algn="l" defTabSz="914400" rtl="0" eaLnBrk="1" latinLnBrk="0" hangingPunct="1">
+      <a:defRPr sz="1200" kern="1200">
+        <a:solidFill>
+          <a:schemeClr val="tx1"/>
+        </a:solidFill>
+        <a:latin typeface="+mn-lt"/>
+        <a:ea typeface="+mn-ea"/>
+        <a:cs typeface="+mn-cs"/>
+      </a:defRPr>
+    </a:lvl7pPr>
+    <a:lvl8pPr marL="3200400" algn="l" defTabSz="914400" rtl="0" eaLnBrk="1" latinLnBrk="0" hangingPunct="1">
+      <a:defRPr sz="1200" kern="1200">
+        <a:solidFill>
+          <a:schemeClr val="tx1"/>
+        </a:solidFill>
+        <a:latin typeface="+mn-lt"/>
+        <a:ea typeface="+mn-ea"/>
+        <a:cs typeface="+mn-cs"/>
+      </a:defRPr>
+    </a:lvl8pPr>
+    <a:lvl9pPr marL="3657600" algn="l" defTabSz="914400" rtl="0" eaLnBrk="1" latinLnBrk="0" hangingPunct="1">
+      <a:defRPr sz="1200" kern="1200">
+        <a:solidFill>
+          <a:schemeClr val="tx1"/>
+        </a:solidFill>
+        <a:latin typeface="+mn-lt"/>
+        <a:ea typeface="+mn-ea"/>
+        <a:cs typeface="+mn-cs"/>
+      </a:defRPr>
+    </a:lvl9pPr>
+  </p:notesStyle>
+</p:notesMaster>
+</file>
+
+<file path=ppt/notesSlides/notesSlide1.xml><?xml version="1.0" encoding="utf-8"?>
+<p:notes xmlns:a="http://schemas.openxmlformats.org/drawingml/2006/main" xmlns:r="http://schemas.openxmlformats.org/officeDocument/2006/relationships" xmlns:p="http://schemas.openxmlformats.org/presentationml/2006/main">
+  <p:cSld>
+    <p:spTree>
+      <p:nvGrpSpPr>
+        <p:cNvPr id="1" name=""/>
+        <p:cNvGrpSpPr/>
+        <p:nvPr/>
+      </p:nvGrpSpPr>
+      <p:grpSpPr>
+        <a:xfrm>
+          <a:off x="0" y="0"/>
+          <a:ext cx="0" cy="0"/>
+          <a:chOff x="0" y="0"/>
+          <a:chExt cx="0" cy="0"/>
+        </a:xfrm>
+      </p:grpSpPr>
+      <p:sp>
+        <p:nvSpPr>
+          <p:cNvPr id="2" name="Slide Image Placeholder 1"/>
+          <p:cNvSpPr>
+            <a:spLocks noGrp="1" noRot="1" noChangeAspect="1"/>
+          </p:cNvSpPr>
+          <p:nvPr>
+            <p:ph type="sldImg"/>
+          </p:nvPr>
+        </p:nvSpPr>
+        <p:spPr/>
+      </p:sp>
+      <p:sp>
+        <p:nvSpPr>
+          <p:cNvPr id="3" name="Notes Placeholder 2"/>
+          <p:cNvSpPr>
+            <a:spLocks noGrp="1"/>
+          </p:cNvSpPr>
+          <p:nvPr>
+            <p:ph type="body" idx="1"/>
+          </p:nvPr>
+        </p:nvSpPr>
+        <p:spPr/>
+        <p:txBody>
+          <a:bodyPr/>
+          <a:lstStyle/>
+          <a:p>
+            <a:endParaRPr lang="es-419" dirty="0"/>
+          </a:p>
+        </p:txBody>
+      </p:sp>
+      <p:sp>
+        <p:nvSpPr>
+          <p:cNvPr id="4" name="Slide Number Placeholder 3"/>
+          <p:cNvSpPr>
+            <a:spLocks noGrp="1"/>
+          </p:cNvSpPr>
+          <p:nvPr>
+            <p:ph type="sldNum" sz="quarter" idx="5"/>
+          </p:nvPr>
+        </p:nvSpPr>
+        <p:spPr/>
+        <p:txBody>
+          <a:bodyPr/>
+          <a:lstStyle/>
+          <a:p>
+            <a:fld id="{502162E8-8D8F-4731-BCC2-3C842183D0BF}" type="slidenum">
+              <a:rPr lang="es-419" smtClean="0"/>
+              <a:t>12</a:t>
+            </a:fld>
+            <a:endParaRPr lang="es-419"/>
+          </a:p>
+        </p:txBody>
+      </p:sp>
+    </p:spTree>
+    <p:extLst>
+      <p:ext uri="{BB962C8B-B14F-4D97-AF65-F5344CB8AC3E}">
+        <p14:creationId xmlns:p14="http://schemas.microsoft.com/office/powerpoint/2010/main" val="1640699538"/>
+      </p:ext>
+    </p:extLst>
+  </p:cSld>
+  <p:clrMapOvr>
+    <a:masterClrMapping/>
+  </p:clrMapOvr>
+</p:notes>
 </file>
 
 <file path=ppt/slideLayouts/slideLayout1.xml><?xml version="1.0" encoding="utf-8"?>
@@ -3884,12 +4384,57 @@
           <a:chExt cx="0" cy="0"/>
         </a:xfrm>
       </p:grpSpPr>
+      <p:sp>
+        <p:nvSpPr>
+          <p:cNvPr id="7" name="Title 1">
+            <a:extLst>
+              <a:ext uri="{FF2B5EF4-FFF2-40B4-BE49-F238E27FC236}">
+                <a16:creationId xmlns:a16="http://schemas.microsoft.com/office/drawing/2014/main" id="{17785AF1-541C-701E-AAA0-E5C49AC4C275}"/>
+              </a:ext>
+            </a:extLst>
+          </p:cNvPr>
+          <p:cNvSpPr>
+            <a:spLocks noGrp="1"/>
+          </p:cNvSpPr>
+          <p:nvPr>
+            <p:ph type="title"/>
+          </p:nvPr>
+        </p:nvSpPr>
+        <p:spPr>
+          <a:xfrm>
+            <a:off x="2479675" y="357715"/>
+            <a:ext cx="7118350" cy="847725"/>
+          </a:xfrm>
+        </p:spPr>
+        <p:txBody>
+          <a:bodyPr>
+            <a:normAutofit/>
+          </a:bodyPr>
+          <a:lstStyle/>
+          <a:p>
+            <a:pPr algn="ctr"/>
+            <a:r>
+              <a:rPr lang="es-419" sz="4000" dirty="0" err="1"/>
+              <a:t>Forecast</a:t>
+            </a:r>
+            <a:r>
+              <a:rPr lang="es-419" sz="4000" dirty="0"/>
+              <a:t> </a:t>
+            </a:r>
+            <a:r>
+              <a:rPr lang="es-419" sz="4000" dirty="0" err="1"/>
+              <a:t>Analysis</a:t>
+            </a:r>
+            <a:endParaRPr lang="es-419" sz="4000" dirty="0"/>
+          </a:p>
+        </p:txBody>
+      </p:sp>
       <p:pic>
         <p:nvPicPr>
-          <p:cNvPr id="6" name="Picture 5">
-            <a:extLst>
-              <a:ext uri="{FF2B5EF4-FFF2-40B4-BE49-F238E27FC236}">
-                <a16:creationId xmlns:a16="http://schemas.microsoft.com/office/drawing/2014/main" id="{7CE01A29-A1DB-AE4B-23A5-BD758988B86E}"/>
+          <p:cNvPr id="3" name="Picture 2">
+            <a:extLst>
+              <a:ext uri="{FF2B5EF4-FFF2-40B4-BE49-F238E27FC236}">
+                <a16:creationId xmlns:a16="http://schemas.microsoft.com/office/drawing/2014/main" id="{03EE1032-1780-9166-9372-F2EB9C7B414A}"/>
               </a:ext>
             </a:extLst>
           </p:cNvPr>
@@ -3906,59 +4451,14 @@
         </p:blipFill>
         <p:spPr>
           <a:xfrm>
-            <a:off x="1174356" y="1094056"/>
-            <a:ext cx="10084193" cy="5689772"/>
+            <a:off x="939800" y="1163107"/>
+            <a:ext cx="10439400" cy="5163974"/>
           </a:xfrm>
           <a:prstGeom prst="rect">
             <a:avLst/>
           </a:prstGeom>
         </p:spPr>
       </p:pic>
-      <p:sp>
-        <p:nvSpPr>
-          <p:cNvPr id="7" name="Title 1">
-            <a:extLst>
-              <a:ext uri="{FF2B5EF4-FFF2-40B4-BE49-F238E27FC236}">
-                <a16:creationId xmlns:a16="http://schemas.microsoft.com/office/drawing/2014/main" id="{17785AF1-541C-701E-AAA0-E5C49AC4C275}"/>
-              </a:ext>
-            </a:extLst>
-          </p:cNvPr>
-          <p:cNvSpPr>
-            <a:spLocks noGrp="1"/>
-          </p:cNvSpPr>
-          <p:nvPr>
-            <p:ph type="title"/>
-          </p:nvPr>
-        </p:nvSpPr>
-        <p:spPr>
-          <a:xfrm>
-            <a:off x="2479675" y="357715"/>
-            <a:ext cx="7118350" cy="847725"/>
-          </a:xfrm>
-        </p:spPr>
-        <p:txBody>
-          <a:bodyPr>
-            <a:normAutofit/>
-          </a:bodyPr>
-          <a:lstStyle/>
-          <a:p>
-            <a:pPr algn="ctr"/>
-            <a:r>
-              <a:rPr lang="es-419" sz="4000" dirty="0" err="1"/>
-              <a:t>Forecast</a:t>
-            </a:r>
-            <a:r>
-              <a:rPr lang="es-419" sz="4000" dirty="0"/>
-              <a:t> </a:t>
-            </a:r>
-            <a:r>
-              <a:rPr lang="es-419" sz="4000" dirty="0" err="1"/>
-              <a:t>Analysis</a:t>
-            </a:r>
-            <a:endParaRPr lang="es-419" sz="4000" dirty="0"/>
-          </a:p>
-        </p:txBody>
-      </p:sp>
     </p:spTree>
     <p:extLst>
       <p:ext uri="{BB962C8B-B14F-4D97-AF65-F5344CB8AC3E}">
@@ -3989,6 +4489,111 @@
           <a:chExt cx="0" cy="0"/>
         </a:xfrm>
       </p:grpSpPr>
+      <p:pic>
+        <p:nvPicPr>
+          <p:cNvPr id="5" name="Picture 4">
+            <a:extLst>
+              <a:ext uri="{FF2B5EF4-FFF2-40B4-BE49-F238E27FC236}">
+                <a16:creationId xmlns:a16="http://schemas.microsoft.com/office/drawing/2014/main" id="{AF416A3A-718A-51B8-DA98-43A215AC7D73}"/>
+              </a:ext>
+            </a:extLst>
+          </p:cNvPr>
+          <p:cNvPicPr>
+            <a:picLocks noChangeAspect="1"/>
+          </p:cNvPicPr>
+          <p:nvPr/>
+        </p:nvPicPr>
+        <p:blipFill>
+          <a:blip r:embed="rId2"/>
+          <a:stretch>
+            <a:fillRect/>
+          </a:stretch>
+        </p:blipFill>
+        <p:spPr>
+          <a:xfrm>
+            <a:off x="710595" y="1205440"/>
+            <a:ext cx="10770809" cy="5350907"/>
+          </a:xfrm>
+          <a:prstGeom prst="rect">
+            <a:avLst/>
+          </a:prstGeom>
+        </p:spPr>
+      </p:pic>
+      <p:sp>
+        <p:nvSpPr>
+          <p:cNvPr id="6" name="Title 1">
+            <a:extLst>
+              <a:ext uri="{FF2B5EF4-FFF2-40B4-BE49-F238E27FC236}">
+                <a16:creationId xmlns:a16="http://schemas.microsoft.com/office/drawing/2014/main" id="{1A651416-48A9-785A-5698-5FA6A41B90C0}"/>
+              </a:ext>
+            </a:extLst>
+          </p:cNvPr>
+          <p:cNvSpPr>
+            <a:spLocks noGrp="1"/>
+          </p:cNvSpPr>
+          <p:nvPr>
+            <p:ph type="title"/>
+          </p:nvPr>
+        </p:nvSpPr>
+        <p:spPr>
+          <a:xfrm>
+            <a:off x="2479675" y="357715"/>
+            <a:ext cx="7118350" cy="847725"/>
+          </a:xfrm>
+        </p:spPr>
+        <p:txBody>
+          <a:bodyPr>
+            <a:normAutofit/>
+          </a:bodyPr>
+          <a:lstStyle/>
+          <a:p>
+            <a:pPr algn="ctr"/>
+            <a:r>
+              <a:rPr lang="es-419" sz="4000" dirty="0" err="1"/>
+              <a:t>Forecast</a:t>
+            </a:r>
+            <a:r>
+              <a:rPr lang="es-419" sz="4000" dirty="0"/>
+              <a:t> </a:t>
+            </a:r>
+            <a:r>
+              <a:rPr lang="es-419" sz="4000" dirty="0" err="1"/>
+              <a:t>Analysis</a:t>
+            </a:r>
+            <a:endParaRPr lang="es-419" sz="4000" dirty="0"/>
+          </a:p>
+        </p:txBody>
+      </p:sp>
+    </p:spTree>
+    <p:extLst>
+      <p:ext uri="{BB962C8B-B14F-4D97-AF65-F5344CB8AC3E}">
+        <p14:creationId xmlns:p14="http://schemas.microsoft.com/office/powerpoint/2010/main" val="484537526"/>
+      </p:ext>
+    </p:extLst>
+  </p:cSld>
+  <p:clrMapOvr>
+    <a:masterClrMapping/>
+  </p:clrMapOvr>
+</p:sld>
+</file>
+
+<file path=ppt/slides/slide12.xml><?xml version="1.0" encoding="utf-8"?>
+<p:sld xmlns:a="http://schemas.openxmlformats.org/drawingml/2006/main" xmlns:r="http://schemas.openxmlformats.org/officeDocument/2006/relationships" xmlns:p="http://schemas.openxmlformats.org/presentationml/2006/main">
+  <p:cSld>
+    <p:spTree>
+      <p:nvGrpSpPr>
+        <p:cNvPr id="1" name=""/>
+        <p:cNvGrpSpPr/>
+        <p:nvPr/>
+      </p:nvGrpSpPr>
+      <p:grpSpPr>
+        <a:xfrm>
+          <a:off x="0" y="0"/>
+          <a:ext cx="0" cy="0"/>
+          <a:chOff x="0" y="0"/>
+          <a:chExt cx="0" cy="0"/>
+        </a:xfrm>
+      </p:grpSpPr>
       <p:sp>
         <p:nvSpPr>
           <p:cNvPr id="2" name="Title 1">
@@ -4005,9 +4610,16 @@
             <p:ph type="title"/>
           </p:nvPr>
         </p:nvSpPr>
-        <p:spPr/>
-        <p:txBody>
-          <a:bodyPr/>
+        <p:spPr>
+          <a:xfrm>
+            <a:off x="838200" y="609600"/>
+            <a:ext cx="3740150" cy="685800"/>
+          </a:xfrm>
+        </p:spPr>
+        <p:txBody>
+          <a:bodyPr>
+            <a:normAutofit fontScale="90000"/>
+          </a:bodyPr>
           <a:lstStyle/>
           <a:p>
             <a:r>
@@ -4037,7 +4649,7 @@
         <p:spPr>
           <a:xfrm>
             <a:off x="550333" y="1495425"/>
-            <a:ext cx="11116734" cy="5735108"/>
+            <a:ext cx="11116734" cy="4507023"/>
           </a:xfrm>
         </p:spPr>
         <p:txBody>
@@ -4049,29 +4661,14 @@
             <a:pPr algn="just"/>
             <a:r>
               <a:rPr lang="en-US" sz="1900" dirty="0"/>
-              <a:t>"In areas with high elevation variance, the model showed wider probability distributions, indicating higher predictive uncertainty due to micro-climatic effects.</a:t>
+              <a:t>This study shows that temperature is not the sole driver of road failure. By using feature importance, we proved that Atmospheric Pressure (PRES) and Relative Humidity (RHUM) are critical "silent killers." When high humidity saturates the road base and pressure drops during a storm front, the asphalt loses its structural integrity. This proves that a multidimensional weather model is far more accurate than simply tracking the thermometer.</a:t>
             </a:r>
           </a:p>
           <a:p>
             <a:pPr algn="just"/>
             <a:r>
               <a:rPr lang="en-US" sz="1900" dirty="0"/>
-              <a:t> this study is that temperature is not the sole driver of road failure. By using </a:t>
-            </a:r>
-            <a:r>
-              <a:rPr lang="en-US" sz="1900" dirty="0" err="1"/>
-              <a:t>XGBoost</a:t>
-            </a:r>
-            <a:r>
-              <a:rPr lang="en-US" sz="1900" dirty="0"/>
-              <a:t> feature importance, we proved that Atmospheric Pressure (PRES) and Relative Humidity (RHUM) are critical "silent killers." When high humidity saturates the road base and pressure drops during a storm front, the asphalt loses its structural integrity. This proves that a multidimensional weather model is far more accurate than simply tracking the thermometer.</a:t>
-            </a:r>
-          </a:p>
-          <a:p>
-            <a:pPr algn="just"/>
-            <a:r>
-              <a:rPr lang="en-US" sz="1900" dirty="0"/>
-              <a:t>By implementing Bayesian Gaussian Mixture Regression (BGMR), this project successfully shifted the perspective from "counting past holes" to "predicting future risks." The model identified that 70% of the study area reached a Moderate-High risk state (2.37 score) in January 2026. This allows city officials to move away from 311 complaint-based repairs—which are biased by caller volume—and toward a Probabilistic Risk Assessment that targets physical road fatigue before it becomes a hazard.</a:t>
+              <a:t>By implementing Bayesian Gaussian Mixture Regression (BGMR), this project successfully shifted the perspective from "counting past holes" to "predicting future risks." The model identified that 70% of the study area reached a Moderate-High risk state (score of 2.37) in January 2026. This allows city officials to move away from 311 complaint-based repairs—which are biased by caller volume—and toward a Probabilistic Risk Assessment that targets physical road fatigue before it becomes a hazard.</a:t>
             </a:r>
           </a:p>
           <a:p>
@@ -4086,7 +4683,7 @@
             </a:r>
             <a:r>
               <a:rPr lang="en-US" sz="1900" dirty="0"/>
-              <a:t>. By spending three months manually geocoding thousands of intersections and filtering out duplicate reports, we created a high-fidelity "Ground Truth" dataset. This process demonstrated that for AI to be effective in urban infrastructure, the "human in the loop" is essential to correct GPS drift and reporting bias, ensuring that </a:t>
+              <a:t>. By spending three months manually geocoding thousands of intersections and filtering out duplicate reports, we created a high-fidelity "Ground Truth" dataset. This process demonstrated that is essential to correct GPS drift and reporting bias manually, ensuring that </a:t>
             </a:r>
             <a:r>
               <a:rPr lang="en-US" sz="1900" b="1" dirty="0"/>
@@ -4194,15 +4791,15 @@
             </a:pPr>
             <a:r>
               <a:rPr lang="en-US" dirty="0"/>
-              <a:t>The core innovation lies in the use of </a:t>
+              <a:t>We use of </a:t>
             </a:r>
             <a:r>
               <a:rPr lang="en-US" b="1" dirty="0"/>
-              <a:t>Bayesian Gaussian Mixture Regression (BGMR)</a:t>
+              <a:t>Bayesian Gaussian Mixture Regression (BGMR) </a:t>
             </a:r>
             <a:r>
               <a:rPr lang="en-US" dirty="0"/>
-              <a:t>. Unlike standard models, BGMR maps the joint distribution of six environmental pillars—including Relative Humidity (</a:t>
+              <a:t>for predict the probability of occurrence of Number of Pothole in January 2026. Unlike standard models, BGMR maps the joint distribution of six environmental pillars—including Relative Humidity (</a:t>
             </a:r>
             <a:r>
               <a:rPr lang="en-US" i="1" dirty="0"/>
@@ -5469,7 +6066,7 @@
         </p:blipFill>
         <p:spPr>
           <a:xfrm>
-            <a:off x="209821" y="1606550"/>
+            <a:off x="146923" y="1451828"/>
             <a:ext cx="8958977" cy="5092700"/>
           </a:xfrm>
           <a:prstGeom prst="rect">
@@ -6902,4 +7499,319 @@
     </a:ext>
   </a:extLst>
 </a:theme>
+</file>
+
+<file path=ppt/theme/theme2.xml><?xml version="1.0" encoding="utf-8"?>
+<a:theme xmlns:a="http://schemas.openxmlformats.org/drawingml/2006/main" name="Office Theme">
+  <a:themeElements>
+    <a:clrScheme name="Office">
+      <a:dk1>
+        <a:sysClr val="windowText" lastClr="000000"/>
+      </a:dk1>
+      <a:lt1>
+        <a:sysClr val="window" lastClr="FFFFFF"/>
+      </a:lt1>
+      <a:dk2>
+        <a:srgbClr val="0E2841"/>
+      </a:dk2>
+      <a:lt2>
+        <a:srgbClr val="E8E8E8"/>
+      </a:lt2>
+      <a:accent1>
+        <a:srgbClr val="156082"/>
+      </a:accent1>
+      <a:accent2>
+        <a:srgbClr val="E97132"/>
+      </a:accent2>
+      <a:accent3>
+        <a:srgbClr val="196B24"/>
+      </a:accent3>
+      <a:accent4>
+        <a:srgbClr val="0F9ED5"/>
+      </a:accent4>
+      <a:accent5>
+        <a:srgbClr val="A02B93"/>
+      </a:accent5>
+      <a:accent6>
+        <a:srgbClr val="4EA72E"/>
+      </a:accent6>
+      <a:hlink>
+        <a:srgbClr val="467886"/>
+      </a:hlink>
+      <a:folHlink>
+        <a:srgbClr val="96607D"/>
+      </a:folHlink>
+    </a:clrScheme>
+    <a:fontScheme name="Office">
+      <a:majorFont>
+        <a:latin typeface="Aptos Display" panose="02110004020202020204"/>
+        <a:ea typeface=""/>
+        <a:cs typeface=""/>
+        <a:font script="Jpan" typeface="游ゴシック Light"/>
+        <a:font script="Hang" typeface="맑은 고딕"/>
+        <a:font script="Hans" typeface="等线 Light"/>
+        <a:font script="Hant" typeface="新細明體"/>
+        <a:font script="Arab" typeface="Times New Roman"/>
+        <a:font script="Hebr" typeface="Times New Roman"/>
+        <a:font script="Thai" typeface="Angsana New"/>
+        <a:font script="Ethi" typeface="Nyala"/>
+        <a:font script="Beng" typeface="Vrinda"/>
+        <a:font script="Gujr" typeface="Shruti"/>
+        <a:font script="Khmr" typeface="MoolBoran"/>
+        <a:font script="Knda" typeface="Tunga"/>
+        <a:font script="Guru" typeface="Raavi"/>
+        <a:font script="Cans" typeface="Euphemia"/>
+        <a:font script="Cher" typeface="Plantagenet Cherokee"/>
+        <a:font script="Yiii" typeface="Microsoft Yi Baiti"/>
+        <a:font script="Tibt" typeface="Microsoft Himalaya"/>
+        <a:font script="Thaa" typeface="MV Boli"/>
+        <a:font script="Deva" typeface="Mangal"/>
+        <a:font script="Telu" typeface="Gautami"/>
+        <a:font script="Taml" typeface="Latha"/>
+        <a:font script="Syrc" typeface="Estrangelo Edessa"/>
+        <a:font script="Orya" typeface="Kalinga"/>
+        <a:font script="Mlym" typeface="Kartika"/>
+        <a:font script="Laoo" typeface="DokChampa"/>
+        <a:font script="Sinh" typeface="Iskoola Pota"/>
+        <a:font script="Mong" typeface="Mongolian Baiti"/>
+        <a:font script="Viet" typeface="Times New Roman"/>
+        <a:font script="Uigh" typeface="Microsoft Uighur"/>
+        <a:font script="Geor" typeface="Sylfaen"/>
+        <a:font script="Armn" typeface="Arial"/>
+        <a:font script="Bugi" typeface="Leelawadee UI"/>
+        <a:font script="Bopo" typeface="Microsoft JhengHei"/>
+        <a:font script="Java" typeface="Javanese Text"/>
+        <a:font script="Lisu" typeface="Segoe UI"/>
+        <a:font script="Mymr" typeface="Myanmar Text"/>
+        <a:font script="Nkoo" typeface="Ebrima"/>
+        <a:font script="Olck" typeface="Nirmala UI"/>
+        <a:font script="Osma" typeface="Ebrima"/>
+        <a:font script="Phag" typeface="Phagspa"/>
+        <a:font script="Syrn" typeface="Estrangelo Edessa"/>
+        <a:font script="Syrj" typeface="Estrangelo Edessa"/>
+        <a:font script="Syre" typeface="Estrangelo Edessa"/>
+        <a:font script="Sora" typeface="Nirmala UI"/>
+        <a:font script="Tale" typeface="Microsoft Tai Le"/>
+        <a:font script="Talu" typeface="Microsoft New Tai Lue"/>
+        <a:font script="Tfng" typeface="Ebrima"/>
+      </a:majorFont>
+      <a:minorFont>
+        <a:latin typeface="Aptos" panose="02110004020202020204"/>
+        <a:ea typeface=""/>
+        <a:cs typeface=""/>
+        <a:font script="Jpan" typeface="游ゴシック"/>
+        <a:font script="Hang" typeface="맑은 고딕"/>
+        <a:font script="Hans" typeface="等线"/>
+        <a:font script="Hant" typeface="新細明體"/>
+        <a:font script="Arab" typeface="Arial"/>
+        <a:font script="Hebr" typeface="Arial"/>
+        <a:font script="Thai" typeface="Cordia New"/>
+        <a:font script="Ethi" typeface="Nyala"/>
+        <a:font script="Beng" typeface="Vrinda"/>
+        <a:font script="Gujr" typeface="Shruti"/>
+        <a:font script="Khmr" typeface="DaunPenh"/>
+        <a:font script="Knda" typeface="Tunga"/>
+        <a:font script="Guru" typeface="Raavi"/>
+        <a:font script="Cans" typeface="Euphemia"/>
+        <a:font script="Cher" typeface="Plantagenet Cherokee"/>
+        <a:font script="Yiii" typeface="Microsoft Yi Baiti"/>
+        <a:font script="Tibt" typeface="Microsoft Himalaya"/>
+        <a:font script="Thaa" typeface="MV Boli"/>
+        <a:font script="Deva" typeface="Mangal"/>
+        <a:font script="Telu" typeface="Gautami"/>
+        <a:font script="Taml" typeface="Latha"/>
+        <a:font script="Syrc" typeface="Estrangelo Edessa"/>
+        <a:font script="Orya" typeface="Kalinga"/>
+        <a:font script="Mlym" typeface="Kartika"/>
+        <a:font script="Laoo" typeface="DokChampa"/>
+        <a:font script="Sinh" typeface="Iskoola Pota"/>
+        <a:font script="Mong" typeface="Mongolian Baiti"/>
+        <a:font script="Viet" typeface="Arial"/>
+        <a:font script="Uigh" typeface="Microsoft Uighur"/>
+        <a:font script="Geor" typeface="Sylfaen"/>
+        <a:font script="Armn" typeface="Arial"/>
+        <a:font script="Bugi" typeface="Leelawadee UI"/>
+        <a:font script="Bopo" typeface="Microsoft JhengHei"/>
+        <a:font script="Java" typeface="Javanese Text"/>
+        <a:font script="Lisu" typeface="Segoe UI"/>
+        <a:font script="Mymr" typeface="Myanmar Text"/>
+        <a:font script="Nkoo" typeface="Ebrima"/>
+        <a:font script="Olck" typeface="Nirmala UI"/>
+        <a:font script="Osma" typeface="Ebrima"/>
+        <a:font script="Phag" typeface="Phagspa"/>
+        <a:font script="Syrn" typeface="Estrangelo Edessa"/>
+        <a:font script="Syrj" typeface="Estrangelo Edessa"/>
+        <a:font script="Syre" typeface="Estrangelo Edessa"/>
+        <a:font script="Sora" typeface="Nirmala UI"/>
+        <a:font script="Tale" typeface="Microsoft Tai Le"/>
+        <a:font script="Talu" typeface="Microsoft New Tai Lue"/>
+        <a:font script="Tfng" typeface="Ebrima"/>
+      </a:minorFont>
+    </a:fontScheme>
+    <a:fmtScheme name="Office">
+      <a:fillStyleLst>
+        <a:solidFill>
+          <a:schemeClr val="phClr"/>
+        </a:solidFill>
+        <a:gradFill rotWithShape="1">
+          <a:gsLst>
+            <a:gs pos="0">
+              <a:schemeClr val="phClr">
+                <a:lumMod val="110000"/>
+                <a:satMod val="105000"/>
+                <a:tint val="67000"/>
+              </a:schemeClr>
+            </a:gs>
+            <a:gs pos="50000">
+              <a:schemeClr val="phClr">
+                <a:lumMod val="105000"/>
+                <a:satMod val="103000"/>
+                <a:tint val="73000"/>
+              </a:schemeClr>
+            </a:gs>
+            <a:gs pos="100000">
+              <a:schemeClr val="phClr">
+                <a:lumMod val="105000"/>
+                <a:satMod val="109000"/>
+                <a:tint val="81000"/>
+              </a:schemeClr>
+            </a:gs>
+          </a:gsLst>
+          <a:lin ang="5400000" scaled="0"/>
+        </a:gradFill>
+        <a:gradFill rotWithShape="1">
+          <a:gsLst>
+            <a:gs pos="0">
+              <a:schemeClr val="phClr">
+                <a:satMod val="103000"/>
+                <a:lumMod val="102000"/>
+                <a:tint val="94000"/>
+              </a:schemeClr>
+            </a:gs>
+            <a:gs pos="50000">
+              <a:schemeClr val="phClr">
+                <a:satMod val="110000"/>
+                <a:lumMod val="100000"/>
+                <a:shade val="100000"/>
+              </a:schemeClr>
+            </a:gs>
+            <a:gs pos="100000">
+              <a:schemeClr val="phClr">
+                <a:lumMod val="99000"/>
+                <a:satMod val="120000"/>
+                <a:shade val="78000"/>
+              </a:schemeClr>
+            </a:gs>
+          </a:gsLst>
+          <a:lin ang="5400000" scaled="0"/>
+        </a:gradFill>
+      </a:fillStyleLst>
+      <a:lnStyleLst>
+        <a:ln w="12700" cap="flat" cmpd="sng" algn="ctr">
+          <a:solidFill>
+            <a:schemeClr val="phClr"/>
+          </a:solidFill>
+          <a:prstDash val="solid"/>
+          <a:miter lim="800000"/>
+        </a:ln>
+        <a:ln w="19050" cap="flat" cmpd="sng" algn="ctr">
+          <a:solidFill>
+            <a:schemeClr val="phClr"/>
+          </a:solidFill>
+          <a:prstDash val="solid"/>
+          <a:miter lim="800000"/>
+        </a:ln>
+        <a:ln w="25400" cap="flat" cmpd="sng" algn="ctr">
+          <a:solidFill>
+            <a:schemeClr val="phClr"/>
+          </a:solidFill>
+          <a:prstDash val="solid"/>
+          <a:miter lim="800000"/>
+        </a:ln>
+      </a:lnStyleLst>
+      <a:effectStyleLst>
+        <a:effectStyle>
+          <a:effectLst/>
+        </a:effectStyle>
+        <a:effectStyle>
+          <a:effectLst/>
+        </a:effectStyle>
+        <a:effectStyle>
+          <a:effectLst>
+            <a:outerShdw blurRad="57150" dist="19050" dir="5400000" algn="ctr" rotWithShape="0">
+              <a:srgbClr val="000000">
+                <a:alpha val="63000"/>
+              </a:srgbClr>
+            </a:outerShdw>
+          </a:effectLst>
+        </a:effectStyle>
+      </a:effectStyleLst>
+      <a:bgFillStyleLst>
+        <a:solidFill>
+          <a:schemeClr val="phClr"/>
+        </a:solidFill>
+        <a:solidFill>
+          <a:schemeClr val="phClr">
+            <a:tint val="95000"/>
+            <a:satMod val="170000"/>
+          </a:schemeClr>
+        </a:solidFill>
+        <a:gradFill rotWithShape="1">
+          <a:gsLst>
+            <a:gs pos="0">
+              <a:schemeClr val="phClr">
+                <a:tint val="93000"/>
+                <a:satMod val="150000"/>
+                <a:shade val="98000"/>
+                <a:lumMod val="102000"/>
+              </a:schemeClr>
+            </a:gs>
+            <a:gs pos="50000">
+              <a:schemeClr val="phClr">
+                <a:tint val="98000"/>
+                <a:satMod val="130000"/>
+                <a:shade val="90000"/>
+                <a:lumMod val="103000"/>
+              </a:schemeClr>
+            </a:gs>
+            <a:gs pos="100000">
+              <a:schemeClr val="phClr">
+                <a:shade val="63000"/>
+                <a:satMod val="120000"/>
+              </a:schemeClr>
+            </a:gs>
+          </a:gsLst>
+          <a:lin ang="5400000" scaled="0"/>
+        </a:gradFill>
+      </a:bgFillStyleLst>
+    </a:fmtScheme>
+  </a:themeElements>
+  <a:objectDefaults>
+    <a:lnDef>
+      <a:spPr/>
+      <a:bodyPr/>
+      <a:lstStyle/>
+      <a:style>
+        <a:lnRef idx="2">
+          <a:schemeClr val="accent1"/>
+        </a:lnRef>
+        <a:fillRef idx="0">
+          <a:schemeClr val="accent1"/>
+        </a:fillRef>
+        <a:effectRef idx="1">
+          <a:schemeClr val="accent1"/>
+        </a:effectRef>
+        <a:fontRef idx="minor">
+          <a:schemeClr val="tx1"/>
+        </a:fontRef>
+      </a:style>
+    </a:lnDef>
+  </a:objectDefaults>
+  <a:extraClrSchemeLst/>
+  <a:extLst>
+    <a:ext uri="{05A4C25C-085E-4340-85A3-A5531E510DB2}">
+      <thm15:themeFamily xmlns:thm15="http://schemas.microsoft.com/office/thememl/2012/main" name="Office Theme" id="{2E142A2C-CD16-42D6-873A-C26D2A0506FA}" vid="{1BDDFF52-6CD6-40A5-AB3C-68EB2F1E4D0A}"/>
+    </a:ext>
+  </a:extLst>
+</a:theme>
 </file>